--- a/Projeto_Final_Artefatos/InsurMinds_Projeto_Final.pptx
+++ b/Projeto_Final_Artefatos/InsurMinds_Projeto_Final.pptx
@@ -11,6 +11,7 @@
     <p:sldId xmlns:r="http://schemas.openxmlformats.org/officeDocument/2006/relationships" id="256" r:id="R4f9975f28cb94e9f"/>
     <p:sldId xmlns:r="http://schemas.openxmlformats.org/officeDocument/2006/relationships" id="257" r:id="Rb6ea4a7ed6ec43e1"/>
     <p:sldId xmlns:r="http://schemas.openxmlformats.org/officeDocument/2006/relationships" id="258" r:id="R56282d9fe742439f"/>
+    <p:sldId xmlns:ns0="http://schemas.openxmlformats.org/officeDocument/2006/relationships" id="264" ns0:id="rId14"/>
     <p:sldId xmlns:r="http://schemas.openxmlformats.org/officeDocument/2006/relationships" id="259" r:id="Rc1875eb09f90410b"/>
     <p:sldId xmlns:r="http://schemas.openxmlformats.org/officeDocument/2006/relationships" id="260" r:id="Rd2e5a6691437490b"/>
     <p:sldId xmlns:r="http://schemas.openxmlformats.org/officeDocument/2006/relationships" id="261" r:id="Rfea3761545884144"/>
@@ -449,7 +450,7 @@
           <a:lstStyle xmlns:a="http://schemas.openxmlformats.org/drawingml/2006/main"/>
           <a:p xmlns:a="http://schemas.openxmlformats.org/drawingml/2006/main">
             <a:r>
-              <a:t>Fontes: enunciado do Projeto Final fornecido pelo grupo, pp. 20-23; repositório InsurMinds. Completar no slide ou na apresentação oral os nomes dos restantes integrantes.</a:t>
+              <a:t>Fontes: enunciado do Projeto Final (pp. 20-23) e repositório InsurMinds (README, integrantes). Frentes: Jheniffer, IA, agentes e comparação; Matheus, IA, dados e desenvolvimento.</a:t>
             </a:r>
           </a:p>
         </p:txBody>
@@ -589,7 +590,7 @@
           <a:lstStyle xmlns:a="http://schemas.openxmlformats.org/drawingml/2006/main"/>
           <a:p xmlns:a="http://schemas.openxmlformats.org/drawingml/2006/main">
             <a:r>
-              <a:t>Fontes: docs/arquitetura.md; src/ingestion, src/extraction, src/llm, src/comparison, app/main.py e src/database.</a:t>
+              <a:t>Fontes: docs/arquitetura.md; src/ingestion, src/extraction, src/llm, src/comparison, app/main.py e src/database. O agente envia lotes de até 16 chunks, em sequência.</a:t>
             </a:r>
           </a:p>
         </p:txBody>
@@ -729,7 +730,7 @@
           <a:lstStyle xmlns:a="http://schemas.openxmlformats.org/drawingml/2006/main"/>
           <a:p xmlns:a="http://schemas.openxmlformats.org/drawingml/2006/main">
             <a:r>
-              <a:t>Exemplo ilustrativo transcrito do golden dataset no documento Regras de Negócio. Não é uma análise executada pelo app.</a:t>
+              <a:t>Saída real do app, executado com o Gemini (gemini-3.1-flash-lite) em 7 out 2026 sobre Apolice_DO_Ficticia_A.pdf e Apolice_DO_Ficticia_B.pdf: 10 critérios, 6 iguais, 2 diferenças e 2 para revisar. LMI/sublimites e extensões não foram localizados nas duas.</a:t>
             </a:r>
           </a:p>
         </p:txBody>
@@ -869,7 +870,7 @@
           <a:lstStyle xmlns:a="http://schemas.openxmlformats.org/drawingml/2006/main"/>
           <a:p xmlns:a="http://schemas.openxmlformats.org/drawingml/2006/main">
             <a:r>
-              <a:t>Fontes: código local e README.md em 3 out 2026. Código de aplicação e relatório ainda precisam de validação ao vivo com chave/modelo.</a:t>
+              <a:t>Fontes: código, README e execução da interface em 7 out 2026. Suíte pytest: 131 passaram, 1 ignorado por desenho. Teste real com dois documentos extensos: 180 critérios, 4 iguais, 0 diferenças, 176 para revisar. Nenhuma métrica de acurácia foi medida.</a:t>
             </a:r>
           </a:p>
         </p:txBody>
@@ -965,6 +966,76 @@
   </p:cSld>
   <p:clrMapOvr>
     <a:masterClrMapping xmlns:a="http://schemas.openxmlformats.org/drawingml/2006/main"/>
+  </p:clrMapOvr>
+</p:notes>
+</file>
+
+<file path=ppt/notesSlides/notesSlide9.xml><?xml version="1.0" encoding="utf-8"?>
+<p:notes xmlns:a="http://schemas.openxmlformats.org/drawingml/2006/main" xmlns:p="http://schemas.openxmlformats.org/presentationml/2006/main" xmlns:r="http://schemas.openxmlformats.org/officeDocument/2006/relationships">
+  <p:cSld>
+    <p:spTree>
+      <p:nvGrpSpPr>
+        <p:cNvPr id="1" name=""/>
+        <p:cNvGrpSpPr/>
+        <p:nvPr/>
+      </p:nvGrpSpPr>
+      <p:grpSpPr>
+        <a:xfrm>
+          <a:off x="0" y="0"/>
+          <a:ext cx="0" cy="0"/>
+          <a:chOff x="0" y="0"/>
+          <a:chExt cx="0" cy="0"/>
+        </a:xfrm>
+      </p:grpSpPr>
+      <p:sp>
+        <p:nvSpPr>
+          <p:cNvPr id="2" name="Slide Image Placeholder 1"/>
+          <p:cNvSpPr>
+            <a:spLocks noGrp="1"/>
+          </p:cNvSpPr>
+          <p:nvPr>
+            <p:ph type="sldImg" idx="2"/>
+          </p:nvPr>
+        </p:nvSpPr>
+        <p:spPr/>
+      </p:sp>
+      <p:sp>
+        <p:nvSpPr>
+          <p:cNvPr id="3" name="Notes Placeholder 2"/>
+          <p:cNvSpPr>
+            <a:spLocks noGrp="1"/>
+          </p:cNvSpPr>
+          <p:nvPr>
+            <p:ph type="body" idx="3" sz="quarter"/>
+          </p:nvPr>
+        </p:nvSpPr>
+        <p:spPr/>
+        <p:txBody>
+          <a:bodyPr/>
+          <a:lstStyle/>
+          <a:p>
+            <a:r>
+              <a:t>Fontes: README (Tecnologias), docs/ia-agentes-automacao/README.md e requirements.txt. Adaptadores REST nativos, sem SDK adicional.</a:t>
+            </a:r>
+          </a:p>
+        </p:txBody>
+      </p:sp>
+      <p:sp>
+        <p:nvSpPr>
+          <p:cNvPr id="4" name="Slide Number Placeholder 3"/>
+          <p:cNvSpPr>
+            <a:spLocks noGrp="1"/>
+          </p:cNvSpPr>
+          <p:nvPr>
+            <p:ph type="sldNum" idx="5" sz="quarter"/>
+          </p:nvPr>
+        </p:nvSpPr>
+        <p:spPr/>
+      </p:sp>
+    </p:spTree>
+  </p:cSld>
+  <p:clrMapOvr>
+    <a:masterClrMapping/>
   </p:clrMapOvr>
 </p:notes>
 </file>
@@ -1582,6 +1653,10 @@
             <a:noFill/>
           </a:ln>
         </p:spPr>
+        <p:txBody xmlns:a="http://schemas.openxmlformats.org/drawingml/2006/main">
+          <a:bodyPr/>
+          <a:p/>
+        </p:txBody>
       </p:sp>
       <p:sp>
         <p:nvSpPr>
@@ -1612,6 +1687,10 @@
             <a:noFill/>
           </a:ln>
         </p:spPr>
+        <p:txBody xmlns:a="http://schemas.openxmlformats.org/drawingml/2006/main">
+          <a:bodyPr/>
+          <a:p/>
+        </p:txBody>
       </p:sp>
       <p:sp>
         <p:nvSpPr>
@@ -1870,6 +1949,10 @@
             <a:noFill/>
           </a:ln>
         </p:spPr>
+        <p:txBody xmlns:a="http://schemas.openxmlformats.org/drawingml/2006/main">
+          <a:bodyPr/>
+          <a:p/>
+        </p:txBody>
       </p:sp>
       <p:sp>
         <p:nvSpPr>
@@ -1888,7 +1971,7 @@
         <p:spPr>
           <a:xfrm xmlns:a="http://schemas.openxmlformats.org/drawingml/2006/main">
             <a:off x="800100" y="5543550"/>
-            <a:ext cx="4762500" cy="247650"/>
+            <a:ext cx="9000000" cy="247650"/>
           </a:xfrm>
           <a:prstGeom xmlns:a="http://schemas.openxmlformats.org/drawingml/2006/main" prst="rect">
             <a:avLst/>
@@ -1923,7 +2006,7 @@
                 <a:ea typeface="Helvetica Neue"/>
                 <a:cs typeface="Helvetica Neue"/>
               </a:rPr>
-              <a:t>Jheniffer Guimarães</a:t>
+              <a:t>Jheniffer Guimarães | Ivania da Silva | Matheus Neves | Manoel da Silva Neto</a:t>
             </a:r>
           </a:p>
         </p:txBody>
@@ -1945,7 +2028,7 @@
         <p:spPr>
           <a:xfrm xmlns:a="http://schemas.openxmlformats.org/drawingml/2006/main">
             <a:off x="800100" y="5810250"/>
-            <a:ext cx="4762500" cy="238125"/>
+            <a:ext cx="9000000" cy="238125"/>
           </a:xfrm>
           <a:prstGeom xmlns:a="http://schemas.openxmlformats.org/drawingml/2006/main" prst="rect">
             <a:avLst/>
@@ -1980,7 +2063,7 @@
                 <a:ea typeface="Helvetica Neue"/>
                 <a:cs typeface="Helvetica Neue"/>
               </a:rPr>
-              <a:t>IA, agentes e comparação</a:t>
+              <a:t>Projeto académico, 2026</a:t>
             </a:r>
           </a:p>
         </p:txBody>
@@ -2037,7 +2120,7 @@
                 <a:ea typeface="Helvetica Neue"/>
                 <a:cs typeface="Helvetica Neue"/>
               </a:rPr>
-              <a:t>Projeto académico, 2026</a:t>
+              <a:t/>
             </a:r>
           </a:p>
         </p:txBody>
@@ -2100,6 +2183,10 @@
             <a:noFill/>
           </a:ln>
         </p:spPr>
+        <p:txBody xmlns:a="http://schemas.openxmlformats.org/drawingml/2006/main">
+          <a:bodyPr/>
+          <a:p/>
+        </p:txBody>
       </p:sp>
       <p:sp>
         <p:nvSpPr>
@@ -2187,6 +2274,10 @@
             <a:noFill/>
           </a:ln>
         </p:spPr>
+        <p:txBody xmlns:a="http://schemas.openxmlformats.org/drawingml/2006/main">
+          <a:bodyPr/>
+          <a:p/>
+        </p:txBody>
       </p:sp>
       <p:sp>
         <p:nvSpPr>
@@ -2240,7 +2331,7 @@
                 <a:ea typeface="Helvetica Neue"/>
                 <a:cs typeface="Helvetica Neue"/>
               </a:rPr>
-              <a:t>InsurMinds     2/8</a:t>
+              <a:t>InsurMinds     2/9</a:t>
             </a:r>
           </a:p>
         </p:txBody>
@@ -2274,6 +2365,10 @@
             <a:noFill/>
           </a:ln>
         </p:spPr>
+        <p:txBody xmlns:a="http://schemas.openxmlformats.org/drawingml/2006/main">
+          <a:bodyPr/>
+          <a:p/>
+        </p:txBody>
       </p:sp>
       <p:sp>
         <p:nvSpPr>
@@ -2487,6 +2582,10 @@
             <a:noFill/>
           </a:ln>
         </p:spPr>
+        <p:txBody xmlns:a="http://schemas.openxmlformats.org/drawingml/2006/main">
+          <a:bodyPr/>
+          <a:p/>
+        </p:txBody>
       </p:sp>
       <p:sp>
         <p:nvSpPr>
@@ -2786,6 +2885,10 @@
             <a:noFill/>
           </a:ln>
         </p:spPr>
+        <p:txBody xmlns:a="http://schemas.openxmlformats.org/drawingml/2006/main">
+          <a:bodyPr/>
+          <a:p/>
+        </p:txBody>
       </p:sp>
       <p:sp>
         <p:nvSpPr>
@@ -2873,6 +2976,10 @@
             <a:noFill/>
           </a:ln>
         </p:spPr>
+        <p:txBody xmlns:a="http://schemas.openxmlformats.org/drawingml/2006/main">
+          <a:bodyPr/>
+          <a:p/>
+        </p:txBody>
       </p:sp>
       <p:sp>
         <p:nvSpPr>
@@ -2926,7 +3033,7 @@
                 <a:ea typeface="Helvetica Neue"/>
                 <a:cs typeface="Helvetica Neue"/>
               </a:rPr>
-              <a:t>InsurMinds     3/8</a:t>
+              <a:t>InsurMinds     3/9</a:t>
             </a:r>
           </a:p>
         </p:txBody>
@@ -2962,6 +3069,10 @@
             <a:noFill/>
           </a:ln>
         </p:spPr>
+        <p:txBody xmlns:a="http://schemas.openxmlformats.org/drawingml/2006/main">
+          <a:bodyPr/>
+          <a:p/>
+        </p:txBody>
       </p:sp>
       <p:sp>
         <p:nvSpPr>
@@ -3131,6 +3242,10 @@
             <a:noFill/>
           </a:ln>
         </p:spPr>
+        <p:txBody xmlns:a="http://schemas.openxmlformats.org/drawingml/2006/main">
+          <a:bodyPr/>
+          <a:p/>
+        </p:txBody>
       </p:sp>
       <p:sp>
         <p:nvSpPr>
@@ -3300,6 +3415,10 @@
             <a:noFill/>
           </a:ln>
         </p:spPr>
+        <p:txBody xmlns:a="http://schemas.openxmlformats.org/drawingml/2006/main">
+          <a:bodyPr/>
+          <a:p/>
+        </p:txBody>
       </p:sp>
       <p:sp>
         <p:nvSpPr>
@@ -3410,7 +3529,7 @@
                 <a:ea typeface="Helvetica Neue"/>
                 <a:cs typeface="Helvetica Neue"/>
               </a:rPr>
-              <a:t>LLM em lotes</a:t>
+              <a:t>Gemini, fallback Groq</a:t>
             </a:r>
           </a:p>
           <a:p xmlns:a="http://schemas.openxmlformats.org/drawingml/2006/main">
@@ -3469,6 +3588,10 @@
             <a:noFill/>
           </a:ln>
         </p:spPr>
+        <p:txBody xmlns:a="http://schemas.openxmlformats.org/drawingml/2006/main">
+          <a:bodyPr/>
+          <a:p/>
+        </p:txBody>
       </p:sp>
       <p:sp>
         <p:nvSpPr>
@@ -3638,6 +3761,10 @@
             <a:noFill/>
           </a:ln>
         </p:spPr>
+        <p:txBody xmlns:a="http://schemas.openxmlformats.org/drawingml/2006/main">
+          <a:bodyPr/>
+          <a:p/>
+        </p:txBody>
       </p:sp>
       <p:sp>
         <p:nvSpPr>
@@ -3891,6 +4018,10 @@
             <a:noFill/>
           </a:ln>
         </p:spPr>
+        <p:txBody xmlns:a="http://schemas.openxmlformats.org/drawingml/2006/main">
+          <a:bodyPr/>
+          <a:p/>
+        </p:txBody>
       </p:sp>
       <p:sp>
         <p:nvSpPr>
@@ -3978,6 +4109,10 @@
             <a:noFill/>
           </a:ln>
         </p:spPr>
+        <p:txBody xmlns:a="http://schemas.openxmlformats.org/drawingml/2006/main">
+          <a:bodyPr/>
+          <a:p/>
+        </p:txBody>
       </p:sp>
       <p:sp>
         <p:nvSpPr>
@@ -4031,7 +4166,7 @@
                 <a:ea typeface="Helvetica Neue"/>
                 <a:cs typeface="Helvetica Neue"/>
               </a:rPr>
-              <a:t>InsurMinds     4/8</a:t>
+              <a:t>InsurMinds     5/9</a:t>
             </a:r>
           </a:p>
         </p:txBody>
@@ -4065,6 +4200,10 @@
             <a:noFill/>
           </a:ln>
         </p:spPr>
+        <p:txBody xmlns:a="http://schemas.openxmlformats.org/drawingml/2006/main">
+          <a:bodyPr/>
+          <a:p/>
+        </p:txBody>
       </p:sp>
       <p:sp>
         <p:nvSpPr>
@@ -4278,6 +4417,10 @@
             <a:noFill/>
           </a:ln>
         </p:spPr>
+        <p:txBody xmlns:a="http://schemas.openxmlformats.org/drawingml/2006/main">
+          <a:bodyPr/>
+          <a:p/>
+        </p:txBody>
       </p:sp>
       <p:sp>
         <p:nvSpPr>
@@ -4491,6 +4634,10 @@
             <a:noFill/>
           </a:ln>
         </p:spPr>
+        <p:txBody xmlns:a="http://schemas.openxmlformats.org/drawingml/2006/main">
+          <a:bodyPr/>
+          <a:p/>
+        </p:txBody>
       </p:sp>
       <p:sp>
         <p:nvSpPr>
@@ -4704,6 +4851,10 @@
             <a:noFill/>
           </a:ln>
         </p:spPr>
+        <p:txBody xmlns:a="http://schemas.openxmlformats.org/drawingml/2006/main">
+          <a:bodyPr/>
+          <a:p/>
+        </p:txBody>
       </p:sp>
       <p:sp>
         <p:nvSpPr>
@@ -4946,6 +5097,10 @@
             <a:noFill/>
           </a:ln>
         </p:spPr>
+        <p:txBody xmlns:a="http://schemas.openxmlformats.org/drawingml/2006/main">
+          <a:bodyPr/>
+          <a:p/>
+        </p:txBody>
       </p:sp>
       <p:sp>
         <p:nvSpPr>
@@ -4999,7 +5154,7 @@
                 <a:ea typeface="Helvetica Neue"/>
                 <a:cs typeface="Helvetica Neue"/>
               </a:rPr>
-              <a:t>Diferenças com fonte</a:t>
+              <a:t>Resultado com apólices fictícias</a:t>
             </a:r>
           </a:p>
         </p:txBody>
@@ -5033,6 +5188,10 @@
             <a:noFill/>
           </a:ln>
         </p:spPr>
+        <p:txBody xmlns:a="http://schemas.openxmlformats.org/drawingml/2006/main">
+          <a:bodyPr/>
+          <a:p/>
+        </p:txBody>
       </p:sp>
       <p:sp>
         <p:nvSpPr>
@@ -5086,7 +5245,7 @@
                 <a:ea typeface="Helvetica Neue"/>
                 <a:cs typeface="Helvetica Neue"/>
               </a:rPr>
-              <a:t>InsurMinds     5/8</a:t>
+              <a:t>InsurMinds     6/9</a:t>
             </a:r>
           </a:p>
         </p:txBody>
@@ -5120,6 +5279,10 @@
             <a:noFill/>
           </a:ln>
         </p:spPr>
+        <p:txBody xmlns:a="http://schemas.openxmlformats.org/drawingml/2006/main">
+          <a:bodyPr/>
+          <a:p/>
+        </p:txBody>
       </p:sp>
       <p:sp>
         <p:nvSpPr>
@@ -5378,6 +5541,10 @@
             <a:noFill/>
           </a:ln>
         </p:spPr>
+        <p:txBody xmlns:a="http://schemas.openxmlformats.org/drawingml/2006/main">
+          <a:bodyPr/>
+          <a:p/>
+        </p:txBody>
       </p:sp>
       <p:sp>
         <p:nvSpPr>
@@ -5488,7 +5655,7 @@
                 <a:ea typeface="Helvetica Neue"/>
                 <a:cs typeface="Helvetica Neue"/>
               </a:rPr>
-              <a:t>R$ 50 milhões</a:t>
+              <a:t>R$ 5 milhões</a:t>
             </a:r>
           </a:p>
         </p:txBody>
@@ -5545,7 +5712,7 @@
                 <a:ea typeface="Helvetica Neue"/>
                 <a:cs typeface="Helvetica Neue"/>
               </a:rPr>
-              <a:t>R$ 100 milhões</a:t>
+              <a:t>R$ 10 milhões</a:t>
             </a:r>
           </a:p>
         </p:txBody>
@@ -5636,6 +5803,10 @@
             <a:noFill/>
           </a:ln>
         </p:spPr>
+        <p:txBody xmlns:a="http://schemas.openxmlformats.org/drawingml/2006/main">
+          <a:bodyPr/>
+          <a:p/>
+        </p:txBody>
       </p:sp>
       <p:sp>
         <p:nvSpPr>
@@ -5894,6 +6065,10 @@
             <a:noFill/>
           </a:ln>
         </p:spPr>
+        <p:txBody xmlns:a="http://schemas.openxmlformats.org/drawingml/2006/main">
+          <a:bodyPr/>
+          <a:p/>
+        </p:txBody>
       </p:sp>
       <p:sp>
         <p:nvSpPr>
@@ -5947,7 +6122,7 @@
                 <a:ea typeface="Helvetica Neue"/>
                 <a:cs typeface="Helvetica Neue"/>
               </a:rPr>
-              <a:t>Side A</a:t>
+              <a:t>LMI / sublimites</a:t>
             </a:r>
           </a:p>
         </p:txBody>
@@ -6004,7 +6179,7 @@
                 <a:ea typeface="Helvetica Neue"/>
                 <a:cs typeface="Helvetica Neue"/>
               </a:rPr>
-              <a:t>Identificada</a:t>
+              <a:t>Não localizado</a:t>
             </a:r>
           </a:p>
         </p:txBody>
@@ -6061,7 +6236,7 @@
                 <a:ea typeface="Helvetica Neue"/>
                 <a:cs typeface="Helvetica Neue"/>
               </a:rPr>
-              <a:t>Identificada</a:t>
+              <a:t>Não localizado</a:t>
             </a:r>
           </a:p>
         </p:txBody>
@@ -6118,7 +6293,7 @@
                 <a:ea typeface="Helvetica Neue"/>
                 <a:cs typeface="Helvetica Neue"/>
               </a:rPr>
-              <a:t>Sem diferença no exemplo</a:t>
+              <a:t>Vai para revisão, não é ausência</a:t>
             </a:r>
           </a:p>
         </p:txBody>
@@ -6238,6 +6413,10 @@
             <a:noFill/>
           </a:ln>
         </p:spPr>
+        <p:txBody xmlns:a="http://schemas.openxmlformats.org/drawingml/2006/main">
+          <a:bodyPr/>
+          <a:p/>
+        </p:txBody>
       </p:sp>
       <p:sp>
         <p:nvSpPr>
@@ -6325,6 +6504,10 @@
             <a:noFill/>
           </a:ln>
         </p:spPr>
+        <p:txBody xmlns:a="http://schemas.openxmlformats.org/drawingml/2006/main">
+          <a:bodyPr/>
+          <a:p/>
+        </p:txBody>
       </p:sp>
       <p:sp>
         <p:nvSpPr>
@@ -6378,7 +6561,7 @@
                 <a:ea typeface="Helvetica Neue"/>
                 <a:cs typeface="Helvetica Neue"/>
               </a:rPr>
-              <a:t>InsurMinds     6/8</a:t>
+              <a:t>InsurMinds     7/9</a:t>
             </a:r>
           </a:p>
         </p:txBody>
@@ -6412,6 +6595,10 @@
             <a:noFill/>
           </a:ln>
         </p:spPr>
+        <p:txBody xmlns:a="http://schemas.openxmlformats.org/drawingml/2006/main">
+          <a:bodyPr/>
+          <a:p/>
+        </p:txBody>
       </p:sp>
       <p:sp>
         <p:nvSpPr>
@@ -6556,6 +6743,10 @@
             <a:noFill/>
           </a:ln>
         </p:spPr>
+        <p:txBody xmlns:a="http://schemas.openxmlformats.org/drawingml/2006/main">
+          <a:bodyPr/>
+          <a:p/>
+        </p:txBody>
       </p:sp>
       <p:sp>
         <p:nvSpPr>
@@ -6700,6 +6891,10 @@
             <a:noFill/>
           </a:ln>
         </p:spPr>
+        <p:txBody xmlns:a="http://schemas.openxmlformats.org/drawingml/2006/main">
+          <a:bodyPr/>
+          <a:p/>
+        </p:txBody>
       </p:sp>
       <p:sp>
         <p:nvSpPr>
@@ -6844,6 +7039,10 @@
             <a:noFill/>
           </a:ln>
         </p:spPr>
+        <p:txBody xmlns:a="http://schemas.openxmlformats.org/drawingml/2006/main">
+          <a:bodyPr/>
+          <a:p/>
+        </p:txBody>
       </p:sp>
       <p:sp>
         <p:nvSpPr>
@@ -7017,6 +7216,10 @@
             <a:noFill/>
           </a:ln>
         </p:spPr>
+        <p:txBody xmlns:a="http://schemas.openxmlformats.org/drawingml/2006/main">
+          <a:bodyPr/>
+          <a:p/>
+        </p:txBody>
       </p:sp>
       <p:sp>
         <p:nvSpPr>
@@ -7104,6 +7307,10 @@
             <a:noFill/>
           </a:ln>
         </p:spPr>
+        <p:txBody xmlns:a="http://schemas.openxmlformats.org/drawingml/2006/main">
+          <a:bodyPr/>
+          <a:p/>
+        </p:txBody>
       </p:sp>
       <p:sp>
         <p:nvSpPr>
@@ -7157,7 +7364,7 @@
                 <a:ea typeface="Helvetica Neue"/>
                 <a:cs typeface="Helvetica Neue"/>
               </a:rPr>
-              <a:t>InsurMinds     7/8</a:t>
+              <a:t>InsurMinds     8/9</a:t>
             </a:r>
           </a:p>
         </p:txBody>
@@ -7191,6 +7398,10 @@
             <a:noFill/>
           </a:ln>
         </p:spPr>
+        <p:txBody xmlns:a="http://schemas.openxmlformats.org/drawingml/2006/main">
+          <a:bodyPr/>
+          <a:p/>
+        </p:txBody>
       </p:sp>
       <p:sp>
         <p:nvSpPr>
@@ -7301,7 +7512,7 @@
                 <a:ea typeface="Helvetica Neue"/>
                 <a:cs typeface="Helvetica Neue"/>
               </a:rPr>
-              <a:t>Ingestão PDF e OCR</a:t>
+              <a:t>Ingestão PDF e OCR local</a:t>
             </a:r>
           </a:p>
           <a:p xmlns:a="http://schemas.openxmlformats.org/drawingml/2006/main">
@@ -7324,7 +7535,7 @@
                 <a:ea typeface="Helvetica Neue"/>
                 <a:cs typeface="Helvetica Neue"/>
               </a:rPr>
-              <a:t>Agente de extração com schema</a:t>
+              <a:t>Extração com citações verificadas</a:t>
             </a:r>
           </a:p>
           <a:p xmlns:a="http://schemas.openxmlformats.org/drawingml/2006/main">
@@ -7347,7 +7558,7 @@
                 <a:ea typeface="Helvetica Neue"/>
                 <a:cs typeface="Helvetica Neue"/>
               </a:rPr>
-              <a:t>Comparador e relatório com evidências</a:t>
+              <a:t>Comparador determinístico</a:t>
             </a:r>
           </a:p>
           <a:p xmlns:a="http://schemas.openxmlformats.org/drawingml/2006/main">
@@ -7370,7 +7581,7 @@
                 <a:ea typeface="Helvetica Neue"/>
                 <a:cs typeface="Helvetica Neue"/>
               </a:rPr>
-              <a:t>Interface de duas apólices</a:t>
+              <a:t>Interface Streamlit de duas apólices</a:t>
             </a:r>
           </a:p>
           <a:p xmlns:a="http://schemas.openxmlformats.org/drawingml/2006/main">
@@ -7393,7 +7604,30 @@
                 <a:ea typeface="Helvetica Neue"/>
                 <a:cs typeface="Helvetica Neue"/>
               </a:rPr>
-              <a:t>Histórico local opcional</a:t>
+              <a:t>Gemini, Groq (fallback) e OpenAI</a:t>
+            </a:r>
+          </a:p>
+          <a:p xmlns:a="http://schemas.openxmlformats.org/drawingml/2006/main">
+            <a:pPr>
+              <a:defRPr sz="1425" b="0">
+                <a:solidFill>
+                  <a:srgbClr val="263746"/>
+                </a:solidFill>
+                <a:latin typeface="Helvetica Neue"/>
+                <a:ea typeface="Helvetica Neue"/>
+                <a:cs typeface="Helvetica Neue"/>
+              </a:defRPr>
+            </a:pPr>
+            <a:r>
+              <a:rPr sz="1425" b="0">
+                <a:solidFill>
+                  <a:srgbClr val="263746"/>
+                </a:solidFill>
+                <a:latin typeface="Helvetica Neue"/>
+                <a:ea typeface="Helvetica Neue"/>
+                <a:cs typeface="Helvetica Neue"/>
+              </a:rPr>
+              <a:t>131 testes e teste real com fictícias</a:t>
             </a:r>
           </a:p>
         </p:txBody>
@@ -7427,6 +7661,10 @@
             <a:noFill/>
           </a:ln>
         </p:spPr>
+        <p:txBody xmlns:a="http://schemas.openxmlformats.org/drawingml/2006/main">
+          <a:bodyPr/>
+          <a:p/>
+        </p:txBody>
       </p:sp>
       <p:sp>
         <p:nvSpPr>
@@ -7537,7 +7775,7 @@
                 <a:ea typeface="Helvetica Neue"/>
                 <a:cs typeface="Helvetica Neue"/>
               </a:rPr>
-              <a:t>Execução com modelo real</a:t>
+              <a:t>Documentos extensos: muita revisão</a:t>
             </a:r>
           </a:p>
           <a:p xmlns:a="http://schemas.openxmlformats.org/drawingml/2006/main">
@@ -7560,7 +7798,7 @@
                 <a:ea typeface="Helvetica Neue"/>
                 <a:cs typeface="Helvetica Neue"/>
               </a:rPr>
-              <a:t>Instalação limpa do app</a:t>
+              <a:t>Métricas por campo (golden dataset)</a:t>
             </a:r>
           </a:p>
           <a:p xmlns:a="http://schemas.openxmlformats.org/drawingml/2006/main">
@@ -7583,7 +7821,7 @@
                 <a:ea typeface="Helvetica Neue"/>
                 <a:cs typeface="Helvetica Neue"/>
               </a:rPr>
-              <a:t>Golden dataset e métricas</a:t>
+              <a:t>Validação do schema com especialista</a:t>
             </a:r>
           </a:p>
           <a:p xmlns:a="http://schemas.openxmlformats.org/drawingml/2006/main">
@@ -7606,30 +7844,7 @@
                 <a:ea typeface="Helvetica Neue"/>
                 <a:cs typeface="Helvetica Neue"/>
               </a:rPr>
-              <a:t>Nomes de todos os integrantes</a:t>
-            </a:r>
-          </a:p>
-          <a:p xmlns:a="http://schemas.openxmlformats.org/drawingml/2006/main">
-            <a:pPr>
-              <a:defRPr sz="1425" b="0">
-                <a:solidFill>
-                  <a:srgbClr val="263746"/>
-                </a:solidFill>
-                <a:latin typeface="Helvetica Neue"/>
-                <a:ea typeface="Helvetica Neue"/>
-                <a:cs typeface="Helvetica Neue"/>
-              </a:defRPr>
-            </a:pPr>
-            <a:r>
-              <a:rPr sz="1425" b="0">
-                <a:solidFill>
-                  <a:srgbClr val="263746"/>
-                </a:solidFill>
-                <a:latin typeface="Helvetica Neue"/>
-                <a:ea typeface="Helvetica Neue"/>
-                <a:cs typeface="Helvetica Neue"/>
-              </a:rPr>
-              <a:t>Gravação da demonstração</a:t>
+              <a:t>Gravação do vídeo de demonstração</a:t>
             </a:r>
           </a:p>
         </p:txBody>
@@ -7686,7 +7901,7 @@
                 <a:ea typeface="Helvetica Neue"/>
                 <a:cs typeface="Helvetica Neue"/>
               </a:rPr>
-              <a:t>Nenhum resultado de acurácia é declarado nesta versão.</a:t>
+              <a:t>Fictícias: LMG e franquia corretos. Documentos reais longos: 176 de 180 critérios para revisar.</a:t>
             </a:r>
           </a:p>
         </p:txBody>
@@ -7749,6 +7964,10 @@
             <a:noFill/>
           </a:ln>
         </p:spPr>
+        <p:txBody xmlns:a="http://schemas.openxmlformats.org/drawingml/2006/main">
+          <a:bodyPr/>
+          <a:p/>
+        </p:txBody>
       </p:sp>
       <p:sp>
         <p:nvSpPr>
@@ -7836,6 +8055,10 @@
             <a:noFill/>
           </a:ln>
         </p:spPr>
+        <p:txBody xmlns:a="http://schemas.openxmlformats.org/drawingml/2006/main">
+          <a:bodyPr/>
+          <a:p/>
+        </p:txBody>
       </p:sp>
       <p:sp>
         <p:nvSpPr>
@@ -7889,7 +8112,7 @@
                 <a:ea typeface="Helvetica Neue"/>
                 <a:cs typeface="Helvetica Neue"/>
               </a:rPr>
-              <a:t>InsurMinds     8/8</a:t>
+              <a:t>InsurMinds     9/9</a:t>
             </a:r>
           </a:p>
         </p:txBody>
@@ -7925,6 +8148,10 @@
             <a:noFill/>
           </a:ln>
         </p:spPr>
+        <p:txBody xmlns:a="http://schemas.openxmlformats.org/drawingml/2006/main">
+          <a:bodyPr/>
+          <a:p/>
+        </p:txBody>
       </p:sp>
       <p:sp>
         <p:nvSpPr>
@@ -8035,7 +8262,7 @@
                 <a:ea typeface="Helvetica Neue"/>
                 <a:cs typeface="Helvetica Neue"/>
               </a:rPr>
-              <a:t>Executar o fluxo com duas apólices públicas ou autorizadas</a:t>
+              <a:t>Reduzir itens para revisão em documentos extensos</a:t>
             </a:r>
           </a:p>
         </p:txBody>
@@ -8071,6 +8298,10 @@
             <a:noFill/>
           </a:ln>
         </p:spPr>
+        <p:txBody xmlns:a="http://schemas.openxmlformats.org/drawingml/2006/main">
+          <a:bodyPr/>
+          <a:p/>
+        </p:txBody>
       </p:sp>
       <p:sp>
         <p:nvSpPr>
@@ -8217,6 +8448,10 @@
             <a:noFill/>
           </a:ln>
         </p:spPr>
+        <p:txBody xmlns:a="http://schemas.openxmlformats.org/drawingml/2006/main">
+          <a:bodyPr/>
+          <a:p/>
+        </p:txBody>
       </p:sp>
       <p:sp>
         <p:nvSpPr>
@@ -8363,6 +8598,10 @@
             <a:noFill/>
           </a:ln>
         </p:spPr>
+        <p:txBody xmlns:a="http://schemas.openxmlformats.org/drawingml/2006/main">
+          <a:bodyPr/>
+          <a:p/>
+        </p:txBody>
       </p:sp>
       <p:sp>
         <p:nvSpPr>
@@ -8473,7 +8712,7 @@
                 <a:ea typeface="Helvetica Neue"/>
                 <a:cs typeface="Helvetica Neue"/>
               </a:rPr>
-              <a:t>Completar nomes da equipa e documentação final</a:t>
+              <a:t>Completar documentação e subir os artefatos no GitHub</a:t>
             </a:r>
           </a:p>
         </p:txBody>
@@ -8509,6 +8748,10 @@
             <a:noFill/>
           </a:ln>
         </p:spPr>
+        <p:txBody xmlns:a="http://schemas.openxmlformats.org/drawingml/2006/main">
+          <a:bodyPr/>
+          <a:p/>
+        </p:txBody>
       </p:sp>
       <p:sp>
         <p:nvSpPr>
@@ -8688,6 +8931,1243 @@
       </p:ext>
     </p:extLst>
   </p:cSld>
+</p:sld>
+</file>
+
+<file path=ppt/slides/slide9.xml><?xml version="1.0" encoding="utf-8"?>
+<p:sld xmlns:a="http://schemas.openxmlformats.org/drawingml/2006/main" xmlns:p="http://schemas.openxmlformats.org/presentationml/2006/main" xmlns:r="http://schemas.openxmlformats.org/officeDocument/2006/relationships">
+  <p:cSld>
+    <p:spTree>
+      <p:nvGrpSpPr>
+        <p:cNvPr id="1" name=""/>
+        <p:cNvGrpSpPr/>
+        <p:nvPr/>
+      </p:nvGrpSpPr>
+      <p:grpSpPr/>
+      <p:sp>
+        <p:nvSpPr>
+          <p:cNvPr id="21" name="">
+            <a:extLst>
+              <a:ext uri="{FF2B5EF4-FFF2-40B4-BE49-F238E27FC236}">
+                <a16:creationId xmlns:a16="http://schemas.microsoft.com/office/drawing/2014/main" id="{6B7557C4-74DB-4EB0-9295-59B579F3AEA7}"/>
+              </a:ext>
+            </a:extLst>
+          </p:cNvPr>
+          <p:cNvSpPr>
+            <a:spLocks noGrp="1"/>
+          </p:cNvSpPr>
+          <p:nvPr/>
+        </p:nvSpPr>
+        <p:spPr>
+          <a:xfrm>
+            <a:off x="0" y="0"/>
+            <a:ext cx="133350" cy="6858000"/>
+          </a:xfrm>
+          <a:prstGeom prst="rect">
+            <a:avLst/>
+          </a:prstGeom>
+          <a:solidFill>
+            <a:srgbClr val="147D83"/>
+          </a:solidFill>
+          <a:ln w="0">
+            <a:noFill/>
+          </a:ln>
+        </p:spPr>
+        <p:txBody>
+          <a:bodyPr/>
+          <a:p/>
+        </p:txBody>
+      </p:sp>
+      <p:sp>
+        <p:nvSpPr>
+          <p:cNvPr id="2" name="">
+            <a:extLst>
+              <a:ext uri="{FF2B5EF4-FFF2-40B4-BE49-F238E27FC236}">
+                <a16:creationId xmlns:a16="http://schemas.microsoft.com/office/drawing/2014/main" id="{547CD9BA-56ED-46A3-B29B-6E4A9DB6E088}"/>
+              </a:ext>
+            </a:extLst>
+          </p:cNvPr>
+          <p:cNvSpPr>
+            <a:spLocks noGrp="1"/>
+          </p:cNvSpPr>
+          <p:nvPr/>
+        </p:nvSpPr>
+        <p:spPr>
+          <a:xfrm>
+            <a:off x="666750" y="438150"/>
+            <a:ext cx="10763250" cy="609600"/>
+          </a:xfrm>
+          <a:prstGeom prst="rect">
+            <a:avLst/>
+          </a:prstGeom>
+          <a:noFill/>
+          <a:ln w="0">
+            <a:noFill/>
+          </a:ln>
+        </p:spPr>
+        <p:txBody>
+          <a:bodyPr>
+            <a:normAutofit fontScale="100000"/>
+          </a:bodyPr>
+          <a:lstStyle/>
+          <a:p>
+            <a:pPr>
+              <a:defRPr sz="2850" b="1">
+                <a:solidFill>
+                  <a:srgbClr val="17324D"/>
+                </a:solidFill>
+                <a:latin typeface="Helvetica Neue"/>
+                <a:ea typeface="Helvetica Neue"/>
+                <a:cs typeface="Helvetica Neue"/>
+              </a:defRPr>
+            </a:pPr>
+            <a:r>
+              <a:rPr sz="2850" b="1">
+                <a:solidFill>
+                  <a:srgbClr val="17324D"/>
+                </a:solidFill>
+                <a:latin typeface="Helvetica Neue"/>
+                <a:ea typeface="Helvetica Neue"/>
+                <a:cs typeface="Helvetica Neue"/>
+              </a:rPr>
+              <a:t>Tecnologias e agentes</a:t>
+            </a:r>
+          </a:p>
+        </p:txBody>
+      </p:sp>
+      <p:sp>
+        <p:nvSpPr>
+          <p:cNvPr id="3" name="">
+            <a:extLst>
+              <a:ext uri="{FF2B5EF4-FFF2-40B4-BE49-F238E27FC236}">
+                <a16:creationId xmlns:a16="http://schemas.microsoft.com/office/drawing/2014/main" id="{AC693E5C-D07D-44F7-8E18-30EB37AC8AF1}"/>
+              </a:ext>
+            </a:extLst>
+          </p:cNvPr>
+          <p:cNvSpPr>
+            <a:spLocks noGrp="1"/>
+          </p:cNvSpPr>
+          <p:nvPr/>
+        </p:nvSpPr>
+        <p:spPr>
+          <a:xfrm>
+            <a:off x="666750" y="1143000"/>
+            <a:ext cx="762000" cy="47625"/>
+          </a:xfrm>
+          <a:prstGeom prst="rect">
+            <a:avLst/>
+          </a:prstGeom>
+          <a:solidFill>
+            <a:srgbClr val="D29B32"/>
+          </a:solidFill>
+          <a:ln w="0">
+            <a:noFill/>
+          </a:ln>
+        </p:spPr>
+        <p:txBody>
+          <a:bodyPr/>
+          <a:p/>
+        </p:txBody>
+      </p:sp>
+      <p:sp>
+        <p:nvSpPr>
+          <p:cNvPr id="4" name="">
+            <a:extLst>
+              <a:ext uri="{FF2B5EF4-FFF2-40B4-BE49-F238E27FC236}">
+                <a16:creationId xmlns:a16="http://schemas.microsoft.com/office/drawing/2014/main" id="{B7023E6E-62A8-4B20-92BB-131E154CF6DC}"/>
+              </a:ext>
+            </a:extLst>
+          </p:cNvPr>
+          <p:cNvSpPr>
+            <a:spLocks noGrp="1"/>
+          </p:cNvSpPr>
+          <p:nvPr/>
+        </p:nvSpPr>
+        <p:spPr>
+          <a:xfrm>
+            <a:off x="666750" y="6477000"/>
+            <a:ext cx="4762500" cy="209550"/>
+          </a:xfrm>
+          <a:prstGeom prst="rect">
+            <a:avLst/>
+          </a:prstGeom>
+          <a:noFill/>
+          <a:ln w="0">
+            <a:noFill/>
+          </a:ln>
+        </p:spPr>
+        <p:txBody>
+          <a:bodyPr>
+            <a:normAutofit fontScale="68889"/>
+          </a:bodyPr>
+          <a:lstStyle/>
+          <a:p>
+            <a:pPr>
+              <a:defRPr sz="1125" b="0">
+                <a:solidFill>
+                  <a:srgbClr val="61717E"/>
+                </a:solidFill>
+                <a:latin typeface="Helvetica Neue"/>
+                <a:ea typeface="Helvetica Neue"/>
+                <a:cs typeface="Helvetica Neue"/>
+              </a:defRPr>
+            </a:pPr>
+            <a:r>
+              <a:rPr sz="1125" b="0">
+                <a:solidFill>
+                  <a:srgbClr val="61717E"/>
+                </a:solidFill>
+                <a:latin typeface="Helvetica Neue"/>
+                <a:ea typeface="Helvetica Neue"/>
+                <a:cs typeface="Helvetica Neue"/>
+              </a:rPr>
+              <a:t>InsurMinds     4/9</a:t>
+            </a:r>
+          </a:p>
+        </p:txBody>
+      </p:sp>
+      <p:sp>
+        <p:nvSpPr>
+          <p:cNvPr id="5" name="">
+            <a:extLst>
+              <a:ext uri="{FF2B5EF4-FFF2-40B4-BE49-F238E27FC236}">
+                <a16:creationId xmlns:a16="http://schemas.microsoft.com/office/drawing/2014/main" id="{9A41F61C-6328-4D70-812D-9CF09D19EE4E}"/>
+              </a:ext>
+            </a:extLst>
+          </p:cNvPr>
+          <p:cNvSpPr>
+            <a:spLocks noGrp="1"/>
+          </p:cNvSpPr>
+          <p:nvPr/>
+        </p:nvSpPr>
+        <p:spPr>
+          <a:xfrm>
+            <a:off x="685800" y="2286000"/>
+            <a:ext cx="2038350" cy="2000250"/>
+          </a:xfrm>
+          <a:prstGeom prst="roundRect">
+            <a:avLst>
+              <a:gd name="adj" fmla="val 3810"/>
+            </a:avLst>
+          </a:prstGeom>
+          <a:solidFill>
+            <a:srgbClr val="EAF2F4"/>
+          </a:solidFill>
+          <a:ln w="0">
+            <a:noFill/>
+          </a:ln>
+        </p:spPr>
+        <p:txBody>
+          <a:bodyPr/>
+          <a:p/>
+        </p:txBody>
+      </p:sp>
+      <p:sp>
+        <p:nvSpPr>
+          <p:cNvPr id="6" name="">
+            <a:extLst>
+              <a:ext uri="{FF2B5EF4-FFF2-40B4-BE49-F238E27FC236}">
+                <a16:creationId xmlns:a16="http://schemas.microsoft.com/office/drawing/2014/main" id="{AAA591AF-9639-4CE3-8796-1B04EB9BFCEE}"/>
+              </a:ext>
+            </a:extLst>
+          </p:cNvPr>
+          <p:cNvSpPr>
+            <a:spLocks noGrp="1"/>
+          </p:cNvSpPr>
+          <p:nvPr/>
+        </p:nvSpPr>
+        <p:spPr>
+          <a:xfrm>
+            <a:off x="847725" y="2571750"/>
+            <a:ext cx="1714500" cy="400050"/>
+          </a:xfrm>
+          <a:prstGeom prst="rect">
+            <a:avLst/>
+          </a:prstGeom>
+          <a:noFill/>
+          <a:ln w="0">
+            <a:noFill/>
+          </a:ln>
+        </p:spPr>
+        <p:txBody>
+          <a:bodyPr>
+            <a:normAutofit fontScale="100000"/>
+          </a:bodyPr>
+          <a:lstStyle/>
+          <a:p>
+            <a:pPr>
+              <a:defRPr sz="1575" b="1">
+                <a:solidFill>
+                  <a:srgbClr val="147D83"/>
+                </a:solidFill>
+                <a:latin typeface="Helvetica Neue"/>
+                <a:ea typeface="Helvetica Neue"/>
+                <a:cs typeface="Helvetica Neue"/>
+              </a:defRPr>
+            </a:pPr>
+            <a:r>
+              <a:rPr sz="1575" b="1">
+                <a:solidFill>
+                  <a:srgbClr val="147D83"/>
+                </a:solidFill>
+                <a:latin typeface="Helvetica Neue"/>
+                <a:ea typeface="Helvetica Neue"/>
+                <a:cs typeface="Helvetica Neue"/>
+              </a:rPr>
+              <a:t>1  Interface</a:t>
+            </a:r>
+          </a:p>
+        </p:txBody>
+      </p:sp>
+      <p:sp>
+        <p:nvSpPr>
+          <p:cNvPr id="7" name="">
+            <a:extLst>
+              <a:ext uri="{FF2B5EF4-FFF2-40B4-BE49-F238E27FC236}">
+                <a16:creationId xmlns:a16="http://schemas.microsoft.com/office/drawing/2014/main" id="{9D6D29C0-F718-4541-84E6-2CCFB303720F}"/>
+              </a:ext>
+            </a:extLst>
+          </p:cNvPr>
+          <p:cNvSpPr>
+            <a:spLocks noGrp="1"/>
+          </p:cNvSpPr>
+          <p:nvPr/>
+        </p:nvSpPr>
+        <p:spPr>
+          <a:xfrm>
+            <a:off x="847725" y="3124200"/>
+            <a:ext cx="1714500" cy="876300"/>
+          </a:xfrm>
+          <a:prstGeom prst="rect">
+            <a:avLst/>
+          </a:prstGeom>
+          <a:noFill/>
+          <a:ln w="0">
+            <a:noFill/>
+          </a:ln>
+        </p:spPr>
+        <p:txBody>
+          <a:bodyPr>
+            <a:normAutofit fontScale="100000"/>
+          </a:bodyPr>
+          <a:lstStyle/>
+          <a:p>
+            <a:pPr>
+              <a:defRPr sz="1350" b="0">
+                <a:solidFill>
+                  <a:srgbClr val="263746"/>
+                </a:solidFill>
+                <a:latin typeface="Helvetica Neue"/>
+                <a:ea typeface="Helvetica Neue"/>
+                <a:cs typeface="Helvetica Neue"/>
+              </a:defRPr>
+            </a:pPr>
+            <a:r>
+              <a:rPr sz="1350" b="0">
+                <a:solidFill>
+                  <a:srgbClr val="263746"/>
+                </a:solidFill>
+                <a:latin typeface="Helvetica Neue"/>
+                <a:ea typeface="Helvetica Neue"/>
+                <a:cs typeface="Helvetica Neue"/>
+              </a:rPr>
+              <a:t>Streamlit</a:t>
+            </a:r>
+          </a:p>
+          <a:p>
+            <a:pPr>
+              <a:defRPr sz="1350" b="0">
+                <a:solidFill>
+                  <a:srgbClr val="263746"/>
+                </a:solidFill>
+                <a:latin typeface="Helvetica Neue"/>
+                <a:ea typeface="Helvetica Neue"/>
+                <a:cs typeface="Helvetica Neue"/>
+              </a:defRPr>
+            </a:pPr>
+            <a:r>
+              <a:rPr sz="1350" b="0">
+                <a:solidFill>
+                  <a:srgbClr val="263746"/>
+                </a:solidFill>
+                <a:latin typeface="Helvetica Neue"/>
+                <a:ea typeface="Helvetica Neue"/>
+                <a:cs typeface="Helvetica Neue"/>
+              </a:rPr>
+              <a:t>duas apólices</a:t>
+            </a:r>
+          </a:p>
+          <a:p>
+            <a:pPr>
+              <a:defRPr sz="1350" b="0">
+                <a:solidFill>
+                  <a:srgbClr val="263746"/>
+                </a:solidFill>
+                <a:latin typeface="Helvetica Neue"/>
+                <a:ea typeface="Helvetica Neue"/>
+                <a:cs typeface="Helvetica Neue"/>
+              </a:defRPr>
+            </a:pPr>
+            <a:r>
+              <a:rPr sz="1350" b="0">
+                <a:solidFill>
+                  <a:srgbClr val="263746"/>
+                </a:solidFill>
+                <a:latin typeface="Helvetica Neue"/>
+                <a:ea typeface="Helvetica Neue"/>
+                <a:cs typeface="Helvetica Neue"/>
+              </a:rPr>
+              <a:t>CSV e histórico</a:t>
+            </a:r>
+          </a:p>
+        </p:txBody>
+      </p:sp>
+      <p:sp>
+        <p:nvSpPr>
+          <p:cNvPr id="8" name="">
+            <a:extLst>
+              <a:ext uri="{FF2B5EF4-FFF2-40B4-BE49-F238E27FC236}">
+                <a16:creationId xmlns:a16="http://schemas.microsoft.com/office/drawing/2014/main" id="{5E01123A-C20C-427A-8880-349C335B9F38}"/>
+              </a:ext>
+            </a:extLst>
+          </p:cNvPr>
+          <p:cNvSpPr>
+            <a:spLocks noGrp="1"/>
+          </p:cNvSpPr>
+          <p:nvPr/>
+        </p:nvSpPr>
+        <p:spPr>
+          <a:xfrm>
+            <a:off x="2895600" y="2286000"/>
+            <a:ext cx="2038350" cy="2000250"/>
+          </a:xfrm>
+          <a:prstGeom prst="roundRect">
+            <a:avLst>
+              <a:gd name="adj" fmla="val 3810"/>
+            </a:avLst>
+          </a:prstGeom>
+          <a:solidFill>
+            <a:srgbClr val="EAF2F4"/>
+          </a:solidFill>
+          <a:ln w="0">
+            <a:noFill/>
+          </a:ln>
+        </p:spPr>
+        <p:txBody>
+          <a:bodyPr/>
+          <a:p/>
+        </p:txBody>
+      </p:sp>
+      <p:sp>
+        <p:nvSpPr>
+          <p:cNvPr id="9" name="">
+            <a:extLst>
+              <a:ext uri="{FF2B5EF4-FFF2-40B4-BE49-F238E27FC236}">
+                <a16:creationId xmlns:a16="http://schemas.microsoft.com/office/drawing/2014/main" id="{7F526904-037A-49AB-BCEC-C3956E610988}"/>
+              </a:ext>
+            </a:extLst>
+          </p:cNvPr>
+          <p:cNvSpPr>
+            <a:spLocks noGrp="1"/>
+          </p:cNvSpPr>
+          <p:nvPr/>
+        </p:nvSpPr>
+        <p:spPr>
+          <a:xfrm>
+            <a:off x="3057525" y="2571750"/>
+            <a:ext cx="1714500" cy="400050"/>
+          </a:xfrm>
+          <a:prstGeom prst="rect">
+            <a:avLst/>
+          </a:prstGeom>
+          <a:noFill/>
+          <a:ln w="0">
+            <a:noFill/>
+          </a:ln>
+        </p:spPr>
+        <p:txBody>
+          <a:bodyPr>
+            <a:normAutofit fontScale="100000"/>
+          </a:bodyPr>
+          <a:lstStyle/>
+          <a:p>
+            <a:pPr>
+              <a:defRPr sz="1575" b="1">
+                <a:solidFill>
+                  <a:srgbClr val="147D83"/>
+                </a:solidFill>
+                <a:latin typeface="Helvetica Neue"/>
+                <a:ea typeface="Helvetica Neue"/>
+                <a:cs typeface="Helvetica Neue"/>
+              </a:defRPr>
+            </a:pPr>
+            <a:r>
+              <a:rPr sz="1575" b="1">
+                <a:solidFill>
+                  <a:srgbClr val="147D83"/>
+                </a:solidFill>
+                <a:latin typeface="Helvetica Neue"/>
+                <a:ea typeface="Helvetica Neue"/>
+                <a:cs typeface="Helvetica Neue"/>
+              </a:rPr>
+              <a:t>2  Ingestão</a:t>
+            </a:r>
+          </a:p>
+        </p:txBody>
+      </p:sp>
+      <p:sp>
+        <p:nvSpPr>
+          <p:cNvPr id="10" name="">
+            <a:extLst>
+              <a:ext uri="{FF2B5EF4-FFF2-40B4-BE49-F238E27FC236}">
+                <a16:creationId xmlns:a16="http://schemas.microsoft.com/office/drawing/2014/main" id="{19DDAD1B-E112-41F8-83FE-DEC7EE0638AC}"/>
+              </a:ext>
+            </a:extLst>
+          </p:cNvPr>
+          <p:cNvSpPr>
+            <a:spLocks noGrp="1"/>
+          </p:cNvSpPr>
+          <p:nvPr/>
+        </p:nvSpPr>
+        <p:spPr>
+          <a:xfrm>
+            <a:off x="3057525" y="3124200"/>
+            <a:ext cx="1714500" cy="876300"/>
+          </a:xfrm>
+          <a:prstGeom prst="rect">
+            <a:avLst/>
+          </a:prstGeom>
+          <a:noFill/>
+          <a:ln w="0">
+            <a:noFill/>
+          </a:ln>
+        </p:spPr>
+        <p:txBody>
+          <a:bodyPr>
+            <a:normAutofit fontScale="100000"/>
+          </a:bodyPr>
+          <a:lstStyle/>
+          <a:p>
+            <a:pPr>
+              <a:defRPr sz="1350" b="0">
+                <a:solidFill>
+                  <a:srgbClr val="263746"/>
+                </a:solidFill>
+                <a:latin typeface="Helvetica Neue"/>
+                <a:ea typeface="Helvetica Neue"/>
+                <a:cs typeface="Helvetica Neue"/>
+              </a:defRPr>
+            </a:pPr>
+            <a:r>
+              <a:rPr sz="1350" b="0">
+                <a:solidFill>
+                  <a:srgbClr val="263746"/>
+                </a:solidFill>
+                <a:latin typeface="Helvetica Neue"/>
+                <a:ea typeface="Helvetica Neue"/>
+                <a:cs typeface="Helvetica Neue"/>
+              </a:rPr>
+              <a:t>pypdf, PyMuPDF</a:t>
+            </a:r>
+          </a:p>
+          <a:p>
+            <a:pPr>
+              <a:defRPr sz="1350" b="0">
+                <a:solidFill>
+                  <a:srgbClr val="263746"/>
+                </a:solidFill>
+                <a:latin typeface="Helvetica Neue"/>
+                <a:ea typeface="Helvetica Neue"/>
+                <a:cs typeface="Helvetica Neue"/>
+              </a:defRPr>
+            </a:pPr>
+            <a:r>
+              <a:rPr sz="1350" b="0">
+                <a:solidFill>
+                  <a:srgbClr val="263746"/>
+                </a:solidFill>
+                <a:latin typeface="Helvetica Neue"/>
+                <a:ea typeface="Helvetica Neue"/>
+                <a:cs typeface="Helvetica Neue"/>
+              </a:rPr>
+              <a:t>OCR local com</a:t>
+            </a:r>
+          </a:p>
+          <a:p>
+            <a:pPr>
+              <a:defRPr sz="1350" b="0">
+                <a:solidFill>
+                  <a:srgbClr val="263746"/>
+                </a:solidFill>
+                <a:latin typeface="Helvetica Neue"/>
+                <a:ea typeface="Helvetica Neue"/>
+                <a:cs typeface="Helvetica Neue"/>
+              </a:defRPr>
+            </a:pPr>
+            <a:r>
+              <a:rPr sz="1350" b="0">
+                <a:solidFill>
+                  <a:srgbClr val="263746"/>
+                </a:solidFill>
+                <a:latin typeface="Helvetica Neue"/>
+                <a:ea typeface="Helvetica Neue"/>
+                <a:cs typeface="Helvetica Neue"/>
+              </a:rPr>
+              <a:t>Tesseract</a:t>
+            </a:r>
+          </a:p>
+        </p:txBody>
+      </p:sp>
+      <p:sp>
+        <p:nvSpPr>
+          <p:cNvPr id="11" name="">
+            <a:extLst>
+              <a:ext uri="{FF2B5EF4-FFF2-40B4-BE49-F238E27FC236}">
+                <a16:creationId xmlns:a16="http://schemas.microsoft.com/office/drawing/2014/main" id="{A961B89A-655E-4428-9656-C7F21873822B}"/>
+              </a:ext>
+            </a:extLst>
+          </p:cNvPr>
+          <p:cNvSpPr>
+            <a:spLocks noGrp="1"/>
+          </p:cNvSpPr>
+          <p:nvPr/>
+        </p:nvSpPr>
+        <p:spPr>
+          <a:xfrm>
+            <a:off x="5105400" y="2286000"/>
+            <a:ext cx="2038350" cy="2000250"/>
+          </a:xfrm>
+          <a:prstGeom prst="roundRect">
+            <a:avLst>
+              <a:gd name="adj" fmla="val 3810"/>
+            </a:avLst>
+          </a:prstGeom>
+          <a:solidFill>
+            <a:srgbClr val="17324D"/>
+          </a:solidFill>
+          <a:ln w="0">
+            <a:noFill/>
+          </a:ln>
+        </p:spPr>
+        <p:txBody>
+          <a:bodyPr/>
+          <a:p/>
+        </p:txBody>
+      </p:sp>
+      <p:sp>
+        <p:nvSpPr>
+          <p:cNvPr id="12" name="">
+            <a:extLst>
+              <a:ext uri="{FF2B5EF4-FFF2-40B4-BE49-F238E27FC236}">
+                <a16:creationId xmlns:a16="http://schemas.microsoft.com/office/drawing/2014/main" id="{7649CE4B-F942-40F4-83CF-33FD5F413D13}"/>
+              </a:ext>
+            </a:extLst>
+          </p:cNvPr>
+          <p:cNvSpPr>
+            <a:spLocks noGrp="1"/>
+          </p:cNvSpPr>
+          <p:nvPr/>
+        </p:nvSpPr>
+        <p:spPr>
+          <a:xfrm>
+            <a:off x="5267325" y="2571750"/>
+            <a:ext cx="1714500" cy="400050"/>
+          </a:xfrm>
+          <a:prstGeom prst="rect">
+            <a:avLst/>
+          </a:prstGeom>
+          <a:noFill/>
+          <a:ln w="0">
+            <a:noFill/>
+          </a:ln>
+        </p:spPr>
+        <p:txBody>
+          <a:bodyPr>
+            <a:normAutofit fontScale="100000"/>
+          </a:bodyPr>
+          <a:lstStyle/>
+          <a:p>
+            <a:pPr>
+              <a:defRPr sz="1575" b="1">
+                <a:solidFill>
+                  <a:srgbClr val="FFFFFF"/>
+                </a:solidFill>
+                <a:latin typeface="Helvetica Neue"/>
+                <a:ea typeface="Helvetica Neue"/>
+                <a:cs typeface="Helvetica Neue"/>
+              </a:defRPr>
+            </a:pPr>
+            <a:r>
+              <a:rPr sz="1575" b="1">
+                <a:solidFill>
+                  <a:srgbClr val="FFFFFF"/>
+                </a:solidFill>
+                <a:latin typeface="Helvetica Neue"/>
+                <a:ea typeface="Helvetica Neue"/>
+                <a:cs typeface="Helvetica Neue"/>
+              </a:rPr>
+              <a:t>3  Agentes</a:t>
+            </a:r>
+          </a:p>
+        </p:txBody>
+      </p:sp>
+      <p:sp>
+        <p:nvSpPr>
+          <p:cNvPr id="13" name="">
+            <a:extLst>
+              <a:ext uri="{FF2B5EF4-FFF2-40B4-BE49-F238E27FC236}">
+                <a16:creationId xmlns:a16="http://schemas.microsoft.com/office/drawing/2014/main" id="{6A75F9B0-C592-4B7D-977D-2C21D05A2AB9}"/>
+              </a:ext>
+            </a:extLst>
+          </p:cNvPr>
+          <p:cNvSpPr>
+            <a:spLocks noGrp="1"/>
+          </p:cNvSpPr>
+          <p:nvPr/>
+        </p:nvSpPr>
+        <p:spPr>
+          <a:xfrm>
+            <a:off x="5267325" y="3124200"/>
+            <a:ext cx="1714500" cy="876300"/>
+          </a:xfrm>
+          <a:prstGeom prst="rect">
+            <a:avLst/>
+          </a:prstGeom>
+          <a:noFill/>
+          <a:ln w="0">
+            <a:noFill/>
+          </a:ln>
+        </p:spPr>
+        <p:txBody>
+          <a:bodyPr>
+            <a:normAutofit fontScale="100000"/>
+          </a:bodyPr>
+          <a:lstStyle/>
+          <a:p>
+            <a:pPr>
+              <a:defRPr sz="1350" b="0">
+                <a:solidFill>
+                  <a:srgbClr val="FFFFFF"/>
+                </a:solidFill>
+                <a:latin typeface="Helvetica Neue"/>
+                <a:ea typeface="Helvetica Neue"/>
+                <a:cs typeface="Helvetica Neue"/>
+              </a:defRPr>
+            </a:pPr>
+            <a:r>
+              <a:rPr sz="1350" b="0">
+                <a:solidFill>
+                  <a:srgbClr val="FFFFFF"/>
+                </a:solidFill>
+                <a:latin typeface="Helvetica Neue"/>
+                <a:ea typeface="Helvetica Neue"/>
+                <a:cs typeface="Helvetica Neue"/>
+              </a:rPr>
+              <a:t>ExtractionAgent</a:t>
+            </a:r>
+          </a:p>
+          <a:p>
+            <a:pPr>
+              <a:defRPr sz="1350" b="0">
+                <a:solidFill>
+                  <a:srgbClr val="FFFFFF"/>
+                </a:solidFill>
+                <a:latin typeface="Helvetica Neue"/>
+                <a:ea typeface="Helvetica Neue"/>
+                <a:cs typeface="Helvetica Neue"/>
+              </a:defRPr>
+            </a:pPr>
+            <a:r>
+              <a:rPr sz="1350" b="0">
+                <a:solidFill>
+                  <a:srgbClr val="FFFFFF"/>
+                </a:solidFill>
+                <a:latin typeface="Helvetica Neue"/>
+                <a:ea typeface="Helvetica Neue"/>
+                <a:cs typeface="Helvetica Neue"/>
+              </a:rPr>
+              <a:t>ExplanationAgent</a:t>
+            </a:r>
+          </a:p>
+          <a:p>
+            <a:pPr>
+              <a:defRPr sz="1350" b="0">
+                <a:solidFill>
+                  <a:srgbClr val="FFFFFF"/>
+                </a:solidFill>
+                <a:latin typeface="Helvetica Neue"/>
+                <a:ea typeface="Helvetica Neue"/>
+                <a:cs typeface="Helvetica Neue"/>
+              </a:defRPr>
+            </a:pPr>
+            <a:r>
+              <a:rPr sz="1350" b="0">
+                <a:solidFill>
+                  <a:srgbClr val="FFFFFF"/>
+                </a:solidFill>
+                <a:latin typeface="Helvetica Neue"/>
+                <a:ea typeface="Helvetica Neue"/>
+                <a:cs typeface="Helvetica Neue"/>
+              </a:rPr>
+              <a:t>Comparador (regras)</a:t>
+            </a:r>
+          </a:p>
+        </p:txBody>
+      </p:sp>
+      <p:sp>
+        <p:nvSpPr>
+          <p:cNvPr id="14" name="">
+            <a:extLst>
+              <a:ext uri="{FF2B5EF4-FFF2-40B4-BE49-F238E27FC236}">
+                <a16:creationId xmlns:a16="http://schemas.microsoft.com/office/drawing/2014/main" id="{BC75E7D6-D751-489E-9342-101E62D250CB}"/>
+              </a:ext>
+            </a:extLst>
+          </p:cNvPr>
+          <p:cNvSpPr>
+            <a:spLocks noGrp="1"/>
+          </p:cNvSpPr>
+          <p:nvPr/>
+        </p:nvSpPr>
+        <p:spPr>
+          <a:xfrm>
+            <a:off x="7315200" y="2286000"/>
+            <a:ext cx="2038350" cy="2000250"/>
+          </a:xfrm>
+          <a:prstGeom prst="roundRect">
+            <a:avLst>
+              <a:gd name="adj" fmla="val 3810"/>
+            </a:avLst>
+          </a:prstGeom>
+          <a:solidFill>
+            <a:srgbClr val="EAF2F4"/>
+          </a:solidFill>
+          <a:ln w="0">
+            <a:noFill/>
+          </a:ln>
+        </p:spPr>
+        <p:txBody>
+          <a:bodyPr/>
+          <a:p/>
+        </p:txBody>
+      </p:sp>
+      <p:sp>
+        <p:nvSpPr>
+          <p:cNvPr id="15" name="">
+            <a:extLst>
+              <a:ext uri="{FF2B5EF4-FFF2-40B4-BE49-F238E27FC236}">
+                <a16:creationId xmlns:a16="http://schemas.microsoft.com/office/drawing/2014/main" id="{1100987B-DFD0-49A6-9BC7-BDDF791D9C5F}"/>
+              </a:ext>
+            </a:extLst>
+          </p:cNvPr>
+          <p:cNvSpPr>
+            <a:spLocks noGrp="1"/>
+          </p:cNvSpPr>
+          <p:nvPr/>
+        </p:nvSpPr>
+        <p:spPr>
+          <a:xfrm>
+            <a:off x="7477125" y="2571750"/>
+            <a:ext cx="1714500" cy="400050"/>
+          </a:xfrm>
+          <a:prstGeom prst="rect">
+            <a:avLst/>
+          </a:prstGeom>
+          <a:noFill/>
+          <a:ln w="0">
+            <a:noFill/>
+          </a:ln>
+        </p:spPr>
+        <p:txBody>
+          <a:bodyPr>
+            <a:normAutofit fontScale="100000"/>
+          </a:bodyPr>
+          <a:lstStyle/>
+          <a:p>
+            <a:pPr>
+              <a:defRPr sz="1575" b="1">
+                <a:solidFill>
+                  <a:srgbClr val="147D83"/>
+                </a:solidFill>
+                <a:latin typeface="Helvetica Neue"/>
+                <a:ea typeface="Helvetica Neue"/>
+                <a:cs typeface="Helvetica Neue"/>
+              </a:defRPr>
+            </a:pPr>
+            <a:r>
+              <a:rPr sz="1575" b="1">
+                <a:solidFill>
+                  <a:srgbClr val="147D83"/>
+                </a:solidFill>
+                <a:latin typeface="Helvetica Neue"/>
+                <a:ea typeface="Helvetica Neue"/>
+                <a:cs typeface="Helvetica Neue"/>
+              </a:rPr>
+              <a:t>4  Provedores</a:t>
+            </a:r>
+          </a:p>
+        </p:txBody>
+      </p:sp>
+      <p:sp>
+        <p:nvSpPr>
+          <p:cNvPr id="16" name="">
+            <a:extLst>
+              <a:ext uri="{FF2B5EF4-FFF2-40B4-BE49-F238E27FC236}">
+                <a16:creationId xmlns:a16="http://schemas.microsoft.com/office/drawing/2014/main" id="{B404AE3F-2EE2-4B97-9711-85E42C237D26}"/>
+              </a:ext>
+            </a:extLst>
+          </p:cNvPr>
+          <p:cNvSpPr>
+            <a:spLocks noGrp="1"/>
+          </p:cNvSpPr>
+          <p:nvPr/>
+        </p:nvSpPr>
+        <p:spPr>
+          <a:xfrm>
+            <a:off x="7477125" y="3124200"/>
+            <a:ext cx="1714500" cy="876300"/>
+          </a:xfrm>
+          <a:prstGeom prst="rect">
+            <a:avLst/>
+          </a:prstGeom>
+          <a:noFill/>
+          <a:ln w="0">
+            <a:noFill/>
+          </a:ln>
+        </p:spPr>
+        <p:txBody>
+          <a:bodyPr>
+            <a:normAutofit fontScale="95370"/>
+          </a:bodyPr>
+          <a:lstStyle/>
+          <a:p>
+            <a:pPr>
+              <a:defRPr sz="1350" b="0">
+                <a:solidFill>
+                  <a:srgbClr val="263746"/>
+                </a:solidFill>
+                <a:latin typeface="Helvetica Neue"/>
+                <a:ea typeface="Helvetica Neue"/>
+                <a:cs typeface="Helvetica Neue"/>
+              </a:defRPr>
+            </a:pPr>
+            <a:r>
+              <a:rPr sz="1350" b="0">
+                <a:solidFill>
+                  <a:srgbClr val="263746"/>
+                </a:solidFill>
+                <a:latin typeface="Helvetica Neue"/>
+                <a:ea typeface="Helvetica Neue"/>
+                <a:cs typeface="Helvetica Neue"/>
+              </a:rPr>
+              <a:t>Gemini primário</a:t>
+            </a:r>
+          </a:p>
+          <a:p>
+            <a:pPr>
+              <a:defRPr sz="1350" b="0">
+                <a:solidFill>
+                  <a:srgbClr val="263746"/>
+                </a:solidFill>
+                <a:latin typeface="Helvetica Neue"/>
+                <a:ea typeface="Helvetica Neue"/>
+                <a:cs typeface="Helvetica Neue"/>
+              </a:defRPr>
+            </a:pPr>
+            <a:r>
+              <a:rPr sz="1350" b="0">
+                <a:solidFill>
+                  <a:srgbClr val="263746"/>
+                </a:solidFill>
+                <a:latin typeface="Helvetica Neue"/>
+                <a:ea typeface="Helvetica Neue"/>
+                <a:cs typeface="Helvetica Neue"/>
+              </a:rPr>
+              <a:t>Groq fallback</a:t>
+            </a:r>
+          </a:p>
+          <a:p>
+            <a:pPr>
+              <a:defRPr sz="1350" b="0">
+                <a:solidFill>
+                  <a:srgbClr val="263746"/>
+                </a:solidFill>
+                <a:latin typeface="Helvetica Neue"/>
+                <a:ea typeface="Helvetica Neue"/>
+                <a:cs typeface="Helvetica Neue"/>
+              </a:defRPr>
+            </a:pPr>
+            <a:r>
+              <a:rPr sz="1350" b="0">
+                <a:solidFill>
+                  <a:srgbClr val="263746"/>
+                </a:solidFill>
+                <a:latin typeface="Helvetica Neue"/>
+                <a:ea typeface="Helvetica Neue"/>
+                <a:cs typeface="Helvetica Neue"/>
+              </a:rPr>
+              <a:t>OpenAI manual</a:t>
+            </a:r>
+          </a:p>
+        </p:txBody>
+      </p:sp>
+      <p:sp>
+        <p:nvSpPr>
+          <p:cNvPr id="17" name="">
+            <a:extLst>
+              <a:ext uri="{FF2B5EF4-FFF2-40B4-BE49-F238E27FC236}">
+                <a16:creationId xmlns:a16="http://schemas.microsoft.com/office/drawing/2014/main" id="{41B946A3-E053-499F-BB2C-34A86B1520F0}"/>
+              </a:ext>
+            </a:extLst>
+          </p:cNvPr>
+          <p:cNvSpPr>
+            <a:spLocks noGrp="1"/>
+          </p:cNvSpPr>
+          <p:nvPr/>
+        </p:nvSpPr>
+        <p:spPr>
+          <a:xfrm>
+            <a:off x="9525000" y="2286000"/>
+            <a:ext cx="2038350" cy="2000250"/>
+          </a:xfrm>
+          <a:prstGeom prst="roundRect">
+            <a:avLst>
+              <a:gd name="adj" fmla="val 3810"/>
+            </a:avLst>
+          </a:prstGeom>
+          <a:solidFill>
+            <a:srgbClr val="EAF2F4"/>
+          </a:solidFill>
+          <a:ln w="0">
+            <a:noFill/>
+          </a:ln>
+        </p:spPr>
+        <p:txBody>
+          <a:bodyPr/>
+          <a:p/>
+        </p:txBody>
+      </p:sp>
+      <p:sp>
+        <p:nvSpPr>
+          <p:cNvPr id="18" name="">
+            <a:extLst>
+              <a:ext uri="{FF2B5EF4-FFF2-40B4-BE49-F238E27FC236}">
+                <a16:creationId xmlns:a16="http://schemas.microsoft.com/office/drawing/2014/main" id="{601D668A-6DA2-45D9-AF8D-1870A18A5AB5}"/>
+              </a:ext>
+            </a:extLst>
+          </p:cNvPr>
+          <p:cNvSpPr>
+            <a:spLocks noGrp="1"/>
+          </p:cNvSpPr>
+          <p:nvPr/>
+        </p:nvSpPr>
+        <p:spPr>
+          <a:xfrm>
+            <a:off x="9686925" y="2571750"/>
+            <a:ext cx="1714500" cy="400050"/>
+          </a:xfrm>
+          <a:prstGeom prst="rect">
+            <a:avLst/>
+          </a:prstGeom>
+          <a:noFill/>
+          <a:ln w="0">
+            <a:noFill/>
+          </a:ln>
+        </p:spPr>
+        <p:txBody>
+          <a:bodyPr>
+            <a:normAutofit fontScale="100000"/>
+          </a:bodyPr>
+          <a:lstStyle/>
+          <a:p>
+            <a:pPr>
+              <a:defRPr sz="1575" b="1">
+                <a:solidFill>
+                  <a:srgbClr val="147D83"/>
+                </a:solidFill>
+                <a:latin typeface="Helvetica Neue"/>
+                <a:ea typeface="Helvetica Neue"/>
+                <a:cs typeface="Helvetica Neue"/>
+              </a:defRPr>
+            </a:pPr>
+            <a:r>
+              <a:rPr sz="1575" b="1">
+                <a:solidFill>
+                  <a:srgbClr val="147D83"/>
+                </a:solidFill>
+                <a:latin typeface="Helvetica Neue"/>
+                <a:ea typeface="Helvetica Neue"/>
+                <a:cs typeface="Helvetica Neue"/>
+              </a:rPr>
+              <a:t>5  Dados</a:t>
+            </a:r>
+          </a:p>
+        </p:txBody>
+      </p:sp>
+      <p:sp>
+        <p:nvSpPr>
+          <p:cNvPr id="19" name="">
+            <a:extLst>
+              <a:ext uri="{FF2B5EF4-FFF2-40B4-BE49-F238E27FC236}">
+                <a16:creationId xmlns:a16="http://schemas.microsoft.com/office/drawing/2014/main" id="{FA23751F-E4CF-42CD-9A24-377F4430FD6B}"/>
+              </a:ext>
+            </a:extLst>
+          </p:cNvPr>
+          <p:cNvSpPr>
+            <a:spLocks noGrp="1"/>
+          </p:cNvSpPr>
+          <p:nvPr/>
+        </p:nvSpPr>
+        <p:spPr>
+          <a:xfrm>
+            <a:off x="9686925" y="3124200"/>
+            <a:ext cx="1714500" cy="876300"/>
+          </a:xfrm>
+          <a:prstGeom prst="rect">
+            <a:avLst/>
+          </a:prstGeom>
+          <a:noFill/>
+          <a:ln w="0">
+            <a:noFill/>
+          </a:ln>
+        </p:spPr>
+        <p:txBody>
+          <a:bodyPr>
+            <a:normAutofit fontScale="100000"/>
+          </a:bodyPr>
+          <a:lstStyle/>
+          <a:p>
+            <a:pPr>
+              <a:defRPr sz="1350" b="0">
+                <a:solidFill>
+                  <a:srgbClr val="263746"/>
+                </a:solidFill>
+                <a:latin typeface="Helvetica Neue"/>
+                <a:ea typeface="Helvetica Neue"/>
+                <a:cs typeface="Helvetica Neue"/>
+              </a:defRPr>
+            </a:pPr>
+            <a:r>
+              <a:rPr sz="1350" b="0">
+                <a:solidFill>
+                  <a:srgbClr val="263746"/>
+                </a:solidFill>
+                <a:latin typeface="Helvetica Neue"/>
+                <a:ea typeface="Helvetica Neue"/>
+                <a:cs typeface="Helvetica Neue"/>
+              </a:rPr>
+              <a:t>Pydantic v2</a:t>
+            </a:r>
+          </a:p>
+          <a:p>
+            <a:pPr>
+              <a:defRPr sz="1350" b="0">
+                <a:solidFill>
+                  <a:srgbClr val="263746"/>
+                </a:solidFill>
+                <a:latin typeface="Helvetica Neue"/>
+                <a:ea typeface="Helvetica Neue"/>
+                <a:cs typeface="Helvetica Neue"/>
+              </a:defRPr>
+            </a:pPr>
+            <a:r>
+              <a:rPr sz="1350" b="0">
+                <a:solidFill>
+                  <a:srgbClr val="263746"/>
+                </a:solidFill>
+                <a:latin typeface="Helvetica Neue"/>
+                <a:ea typeface="Helvetica Neue"/>
+                <a:cs typeface="Helvetica Neue"/>
+              </a:rPr>
+              <a:t>SQLite</a:t>
+            </a:r>
+          </a:p>
+          <a:p>
+            <a:pPr>
+              <a:defRPr sz="1350" b="0">
+                <a:solidFill>
+                  <a:srgbClr val="263746"/>
+                </a:solidFill>
+                <a:latin typeface="Helvetica Neue"/>
+                <a:ea typeface="Helvetica Neue"/>
+                <a:cs typeface="Helvetica Neue"/>
+              </a:defRPr>
+            </a:pPr>
+            <a:r>
+              <a:rPr sz="1350" b="0">
+                <a:solidFill>
+                  <a:srgbClr val="263746"/>
+                </a:solidFill>
+                <a:latin typeface="Helvetica Neue"/>
+                <a:ea typeface="Helvetica Neue"/>
+                <a:cs typeface="Helvetica Neue"/>
+              </a:rPr>
+              <a:t>131 testes pytest</a:t>
+            </a:r>
+          </a:p>
+        </p:txBody>
+      </p:sp>
+      <p:sp>
+        <p:nvSpPr>
+          <p:cNvPr id="20" name="">
+            <a:extLst>
+              <a:ext uri="{FF2B5EF4-FFF2-40B4-BE49-F238E27FC236}">
+                <a16:creationId xmlns:a16="http://schemas.microsoft.com/office/drawing/2014/main" id="{9239DE98-421F-4D28-8031-3F7F325E819F}"/>
+              </a:ext>
+            </a:extLst>
+          </p:cNvPr>
+          <p:cNvSpPr>
+            <a:spLocks noGrp="1"/>
+          </p:cNvSpPr>
+          <p:nvPr/>
+        </p:nvSpPr>
+        <p:spPr>
+          <a:xfrm>
+            <a:off x="762000" y="4953000"/>
+            <a:ext cx="10287000" cy="457200"/>
+          </a:xfrm>
+          <a:prstGeom prst="rect">
+            <a:avLst/>
+          </a:prstGeom>
+          <a:noFill/>
+          <a:ln w="0">
+            <a:noFill/>
+          </a:ln>
+        </p:spPr>
+        <p:txBody>
+          <a:bodyPr>
+            <a:normAutofit fontScale="100000"/>
+          </a:bodyPr>
+          <a:lstStyle/>
+          <a:p>
+            <a:pPr>
+              <a:defRPr sz="1575" b="0">
+                <a:solidFill>
+                  <a:srgbClr val="61717E"/>
+                </a:solidFill>
+                <a:latin typeface="Helvetica Neue"/>
+                <a:ea typeface="Helvetica Neue"/>
+                <a:cs typeface="Helvetica Neue"/>
+              </a:defRPr>
+            </a:pPr>
+            <a:r>
+              <a:rPr sz="1575" b="0">
+                <a:solidFill>
+                  <a:srgbClr val="61717E"/>
+                </a:solidFill>
+                <a:latin typeface="Helvetica Neue"/>
+                <a:ea typeface="Helvetica Neue"/>
+                <a:cs typeface="Helvetica Neue"/>
+              </a:rPr>
+              <a:t>O LLM extrai e explica. Regras determinísticas comparam. Nenhum agente decide qual apólice é melhor.</a:t>
+            </a:r>
+          </a:p>
+        </p:txBody>
+      </p:sp>
+    </p:spTree>
+  </p:cSld>
+  <p:clrMapOvr>
+    <a:masterClrMapping/>
+  </p:clrMapOvr>
 </p:sld>
 </file>
 
